--- a/LYAII-Tema-4/Actividad 4.2 Proyecto Analizador Semántico en Java_CynthiaMorales_LYAII_7ISCM.pptx
+++ b/LYAII-Tema-4/Actividad 4.2 Proyecto Analizador Semántico en Java_CynthiaMorales_LYAII_7ISCM.pptx
@@ -1925,7 +1925,7 @@
           </a:prstGeom>
           <a:extLst>
             <a:ext uri="{C572A759-6A51-4108-AA02-DFA0A04FC94B}">
-              <ma14:wrappingTextBoxFlag xmlns="" xmlns:ma14="http://schemas.microsoft.com/office/mac/drawingml/2011/main" val="0"/>
+              <ma14:wrappingTextBoxFlag xmlns:ma14="http://schemas.microsoft.com/office/mac/drawingml/2011/main" xmlns="" val="0"/>
             </a:ext>
           </a:extLst>
         </p:spPr>
@@ -2050,7 +2050,7 @@
           </a:prstGeom>
           <a:extLst>
             <a:ext uri="{C572A759-6A51-4108-AA02-DFA0A04FC94B}">
-              <ma14:wrappingTextBoxFlag xmlns="" xmlns:ma14="http://schemas.microsoft.com/office/mac/drawingml/2011/main" val="0"/>
+              <ma14:wrappingTextBoxFlag xmlns:ma14="http://schemas.microsoft.com/office/mac/drawingml/2011/main" xmlns="" val="0"/>
             </a:ext>
           </a:extLst>
         </p:spPr>
@@ -2128,7 +2128,7 @@
           </a:prstGeom>
           <a:extLst>
             <a:ext uri="{C572A759-6A51-4108-AA02-DFA0A04FC94B}">
-              <ma14:wrappingTextBoxFlag xmlns="" xmlns:ma14="http://schemas.microsoft.com/office/mac/drawingml/2011/main" val="0"/>
+              <ma14:wrappingTextBoxFlag xmlns:ma14="http://schemas.microsoft.com/office/mac/drawingml/2011/main" xmlns="" val="0"/>
             </a:ext>
           </a:extLst>
         </p:spPr>
@@ -2809,7 +2809,7 @@
                 <a:cs typeface="Glacial Indifference"/>
                 <a:sym typeface="Glacial Indifference"/>
               </a:rPr>
-              <a:t> Frontera Comalapa, Chiapas. A 27 de </a:t>
+              <a:t> Frontera Comalapa, Chiapas. A 04 de </a:t>
             </a:r>
             <a:r>
               <a:rPr lang="en-US" sz="1600" dirty="0" err="1">
@@ -2821,7 +2821,7 @@
                 <a:cs typeface="Glacial Indifference"/>
                 <a:sym typeface="Glacial Indifference"/>
               </a:rPr>
-              <a:t>septiembre</a:t>
+              <a:t>Octubre</a:t>
             </a:r>
             <a:r>
               <a:rPr lang="en-US" sz="1600" dirty="0">
@@ -3398,7 +3398,7 @@
           </a:prstGeom>
           <a:extLst>
             <a:ext uri="{C572A759-6A51-4108-AA02-DFA0A04FC94B}">
-              <ma14:wrappingTextBoxFlag xmlns="" xmlns:ma14="http://schemas.microsoft.com/office/mac/drawingml/2011/main" val="0"/>
+              <ma14:wrappingTextBoxFlag xmlns:ma14="http://schemas.microsoft.com/office/mac/drawingml/2011/main" xmlns="" val="0"/>
             </a:ext>
           </a:extLst>
         </p:spPr>
@@ -3696,7 +3696,7 @@
           </a:prstGeom>
           <a:extLst>
             <a:ext uri="{C572A759-6A51-4108-AA02-DFA0A04FC94B}">
-              <ma14:wrappingTextBoxFlag xmlns="" xmlns:ma14="http://schemas.microsoft.com/office/mac/drawingml/2011/main" val="0"/>
+              <ma14:wrappingTextBoxFlag xmlns:ma14="http://schemas.microsoft.com/office/mac/drawingml/2011/main" xmlns="" val="0"/>
             </a:ext>
           </a:extLst>
         </p:spPr>
@@ -3994,7 +3994,7 @@
           </a:prstGeom>
           <a:extLst>
             <a:ext uri="{C572A759-6A51-4108-AA02-DFA0A04FC94B}">
-              <ma14:wrappingTextBoxFlag xmlns="" xmlns:ma14="http://schemas.microsoft.com/office/mac/drawingml/2011/main" val="0"/>
+              <ma14:wrappingTextBoxFlag xmlns:ma14="http://schemas.microsoft.com/office/mac/drawingml/2011/main" xmlns="" val="0"/>
             </a:ext>
           </a:extLst>
         </p:spPr>
@@ -4292,7 +4292,7 @@
           </a:prstGeom>
           <a:extLst>
             <a:ext uri="{C572A759-6A51-4108-AA02-DFA0A04FC94B}">
-              <ma14:wrappingTextBoxFlag xmlns="" xmlns:ma14="http://schemas.microsoft.com/office/mac/drawingml/2011/main" val="0"/>
+              <ma14:wrappingTextBoxFlag xmlns:ma14="http://schemas.microsoft.com/office/mac/drawingml/2011/main" xmlns="" val="0"/>
             </a:ext>
           </a:extLst>
         </p:spPr>
@@ -4590,7 +4590,7 @@
           </a:prstGeom>
           <a:extLst>
             <a:ext uri="{C572A759-6A51-4108-AA02-DFA0A04FC94B}">
-              <ma14:wrappingTextBoxFlag xmlns="" xmlns:ma14="http://schemas.microsoft.com/office/mac/drawingml/2011/main" val="0"/>
+              <ma14:wrappingTextBoxFlag xmlns:ma14="http://schemas.microsoft.com/office/mac/drawingml/2011/main" xmlns="" val="0"/>
             </a:ext>
           </a:extLst>
         </p:spPr>
@@ -4888,7 +4888,7 @@
           </a:prstGeom>
           <a:extLst>
             <a:ext uri="{C572A759-6A51-4108-AA02-DFA0A04FC94B}">
-              <ma14:wrappingTextBoxFlag xmlns="" xmlns:ma14="http://schemas.microsoft.com/office/mac/drawingml/2011/main" val="0"/>
+              <ma14:wrappingTextBoxFlag xmlns:ma14="http://schemas.microsoft.com/office/mac/drawingml/2011/main" xmlns="" val="0"/>
             </a:ext>
           </a:extLst>
         </p:spPr>
@@ -6991,7 +6991,7 @@
           </a:prstGeom>
           <a:extLst>
             <a:ext uri="{C572A759-6A51-4108-AA02-DFA0A04FC94B}">
-              <ma14:wrappingTextBoxFlag xmlns="" xmlns:ma14="http://schemas.microsoft.com/office/mac/drawingml/2011/main" val="0"/>
+              <ma14:wrappingTextBoxFlag xmlns:ma14="http://schemas.microsoft.com/office/mac/drawingml/2011/main" xmlns="" val="0"/>
             </a:ext>
           </a:extLst>
         </p:spPr>
@@ -7635,7 +7635,7 @@
           </a:prstGeom>
           <a:extLst>
             <a:ext uri="{C572A759-6A51-4108-AA02-DFA0A04FC94B}">
-              <ma14:wrappingTextBoxFlag xmlns="" xmlns:ma14="http://schemas.microsoft.com/office/mac/drawingml/2011/main" val="0"/>
+              <ma14:wrappingTextBoxFlag xmlns:ma14="http://schemas.microsoft.com/office/mac/drawingml/2011/main" xmlns="" val="0"/>
             </a:ext>
           </a:extLst>
         </p:spPr>
@@ -8105,7 +8105,7 @@
           </a:prstGeom>
           <a:extLst>
             <a:ext uri="{C572A759-6A51-4108-AA02-DFA0A04FC94B}">
-              <ma14:wrappingTextBoxFlag xmlns="" xmlns:ma14="http://schemas.microsoft.com/office/mac/drawingml/2011/main" val="0"/>
+              <ma14:wrappingTextBoxFlag xmlns:ma14="http://schemas.microsoft.com/office/mac/drawingml/2011/main" xmlns="" val="0"/>
             </a:ext>
           </a:extLst>
         </p:spPr>
@@ -8578,7 +8578,7 @@
           </a:prstGeom>
           <a:extLst>
             <a:ext uri="{C572A759-6A51-4108-AA02-DFA0A04FC94B}">
-              <ma14:wrappingTextBoxFlag xmlns="" xmlns:ma14="http://schemas.microsoft.com/office/mac/drawingml/2011/main" val="0"/>
+              <ma14:wrappingTextBoxFlag xmlns:ma14="http://schemas.microsoft.com/office/mac/drawingml/2011/main" xmlns="" val="0"/>
             </a:ext>
           </a:extLst>
         </p:spPr>
@@ -9159,7 +9159,7 @@
           </a:prstGeom>
           <a:extLst>
             <a:ext uri="{C572A759-6A51-4108-AA02-DFA0A04FC94B}">
-              <ma14:wrappingTextBoxFlag xmlns="" xmlns:ma14="http://schemas.microsoft.com/office/mac/drawingml/2011/main" val="0"/>
+              <ma14:wrappingTextBoxFlag xmlns:ma14="http://schemas.microsoft.com/office/mac/drawingml/2011/main" xmlns="" val="0"/>
             </a:ext>
           </a:extLst>
         </p:spPr>
@@ -9557,7 +9557,7 @@
           </a:prstGeom>
           <a:extLst>
             <a:ext uri="{C572A759-6A51-4108-AA02-DFA0A04FC94B}">
-              <ma14:wrappingTextBoxFlag xmlns="" xmlns:ma14="http://schemas.microsoft.com/office/mac/drawingml/2011/main" val="0"/>
+              <ma14:wrappingTextBoxFlag xmlns:ma14="http://schemas.microsoft.com/office/mac/drawingml/2011/main" xmlns="" val="0"/>
             </a:ext>
           </a:extLst>
         </p:spPr>
@@ -10201,7 +10201,7 @@
           </a:prstGeom>
           <a:extLst>
             <a:ext uri="{C572A759-6A51-4108-AA02-DFA0A04FC94B}">
-              <ma14:wrappingTextBoxFlag xmlns="" xmlns:ma14="http://schemas.microsoft.com/office/mac/drawingml/2011/main" val="0"/>
+              <ma14:wrappingTextBoxFlag xmlns:ma14="http://schemas.microsoft.com/office/mac/drawingml/2011/main" xmlns="" val="0"/>
             </a:ext>
           </a:extLst>
         </p:spPr>
@@ -11450,7 +11450,7 @@
           </a:prstGeom>
           <a:extLst>
             <a:ext uri="{C572A759-6A51-4108-AA02-DFA0A04FC94B}">
-              <ma14:wrappingTextBoxFlag xmlns="" xmlns:ma14="http://schemas.microsoft.com/office/mac/drawingml/2011/main" val="0"/>
+              <ma14:wrappingTextBoxFlag xmlns:ma14="http://schemas.microsoft.com/office/mac/drawingml/2011/main" xmlns="" val="0"/>
             </a:ext>
           </a:extLst>
         </p:spPr>
@@ -11748,7 +11748,7 @@
           </a:prstGeom>
           <a:extLst>
             <a:ext uri="{C572A759-6A51-4108-AA02-DFA0A04FC94B}">
-              <ma14:wrappingTextBoxFlag xmlns="" xmlns:ma14="http://schemas.microsoft.com/office/mac/drawingml/2011/main" val="0"/>
+              <ma14:wrappingTextBoxFlag xmlns:ma14="http://schemas.microsoft.com/office/mac/drawingml/2011/main" xmlns="" val="0"/>
             </a:ext>
           </a:extLst>
         </p:spPr>
@@ -12046,7 +12046,7 @@
           </a:prstGeom>
           <a:extLst>
             <a:ext uri="{C572A759-6A51-4108-AA02-DFA0A04FC94B}">
-              <ma14:wrappingTextBoxFlag xmlns="" xmlns:ma14="http://schemas.microsoft.com/office/mac/drawingml/2011/main" val="0"/>
+              <ma14:wrappingTextBoxFlag xmlns:ma14="http://schemas.microsoft.com/office/mac/drawingml/2011/main" xmlns="" val="0"/>
             </a:ext>
           </a:extLst>
         </p:spPr>
@@ -12344,7 +12344,7 @@
           </a:prstGeom>
           <a:extLst>
             <a:ext uri="{C572A759-6A51-4108-AA02-DFA0A04FC94B}">
-              <ma14:wrappingTextBoxFlag xmlns="" xmlns:ma14="http://schemas.microsoft.com/office/mac/drawingml/2011/main" val="0"/>
+              <ma14:wrappingTextBoxFlag xmlns:ma14="http://schemas.microsoft.com/office/mac/drawingml/2011/main" xmlns="" val="0"/>
             </a:ext>
           </a:extLst>
         </p:spPr>
@@ -12642,7 +12642,7 @@
           </a:prstGeom>
           <a:extLst>
             <a:ext uri="{C572A759-6A51-4108-AA02-DFA0A04FC94B}">
-              <ma14:wrappingTextBoxFlag xmlns="" xmlns:ma14="http://schemas.microsoft.com/office/mac/drawingml/2011/main" val="0"/>
+              <ma14:wrappingTextBoxFlag xmlns:ma14="http://schemas.microsoft.com/office/mac/drawingml/2011/main" xmlns="" val="0"/>
             </a:ext>
           </a:extLst>
         </p:spPr>

--- a/LYAII-Tema-4/Actividad 4.2 Proyecto Analizador Semántico en Java_CynthiaMorales_LYAII_7ISCM.pptx
+++ b/LYAII-Tema-4/Actividad 4.2 Proyecto Analizador Semántico en Java_CynthiaMorales_LYAII_7ISCM.pptx
@@ -5,7 +5,7 @@
     <p:sldMasterId id="2147483648" r:id="rId1"/>
   </p:sldMasterIdLst>
   <p:notesMasterIdLst>
-    <p:notesMasterId r:id="rId21"/>
+    <p:notesMasterId r:id="rId22"/>
   </p:notesMasterIdLst>
   <p:sldIdLst>
     <p:sldId id="274" r:id="rId2"/>
@@ -27,6 +27,7 @@
     <p:sldId id="271" r:id="rId18"/>
     <p:sldId id="272" r:id="rId19"/>
     <p:sldId id="273" r:id="rId20"/>
+    <p:sldId id="275" r:id="rId21"/>
   </p:sldIdLst>
   <p:sldSz cx="12192000" cy="6858000"/>
   <p:notesSz cx="6858000" cy="12192000"/>
@@ -1925,7 +1926,7 @@
           </a:prstGeom>
           <a:extLst>
             <a:ext uri="{C572A759-6A51-4108-AA02-DFA0A04FC94B}">
-              <ma14:wrappingTextBoxFlag xmlns:ma14="http://schemas.microsoft.com/office/mac/drawingml/2011/main" xmlns="" val="0"/>
+              <ma14:wrappingTextBoxFlag xmlns="" xmlns:ma14="http://schemas.microsoft.com/office/mac/drawingml/2011/main" val="0"/>
             </a:ext>
           </a:extLst>
         </p:spPr>
@@ -2050,7 +2051,7 @@
           </a:prstGeom>
           <a:extLst>
             <a:ext uri="{C572A759-6A51-4108-AA02-DFA0A04FC94B}">
-              <ma14:wrappingTextBoxFlag xmlns:ma14="http://schemas.microsoft.com/office/mac/drawingml/2011/main" xmlns="" val="0"/>
+              <ma14:wrappingTextBoxFlag xmlns="" xmlns:ma14="http://schemas.microsoft.com/office/mac/drawingml/2011/main" val="0"/>
             </a:ext>
           </a:extLst>
         </p:spPr>
@@ -2128,7 +2129,7 @@
           </a:prstGeom>
           <a:extLst>
             <a:ext uri="{C572A759-6A51-4108-AA02-DFA0A04FC94B}">
-              <ma14:wrappingTextBoxFlag xmlns:ma14="http://schemas.microsoft.com/office/mac/drawingml/2011/main" xmlns="" val="0"/>
+              <ma14:wrappingTextBoxFlag xmlns="" xmlns:ma14="http://schemas.microsoft.com/office/mac/drawingml/2011/main" val="0"/>
             </a:ext>
           </a:extLst>
         </p:spPr>
@@ -3398,7 +3399,7 @@
           </a:prstGeom>
           <a:extLst>
             <a:ext uri="{C572A759-6A51-4108-AA02-DFA0A04FC94B}">
-              <ma14:wrappingTextBoxFlag xmlns:ma14="http://schemas.microsoft.com/office/mac/drawingml/2011/main" xmlns="" val="0"/>
+              <ma14:wrappingTextBoxFlag xmlns="" xmlns:ma14="http://schemas.microsoft.com/office/mac/drawingml/2011/main" val="0"/>
             </a:ext>
           </a:extLst>
         </p:spPr>
@@ -3696,7 +3697,7 @@
           </a:prstGeom>
           <a:extLst>
             <a:ext uri="{C572A759-6A51-4108-AA02-DFA0A04FC94B}">
-              <ma14:wrappingTextBoxFlag xmlns:ma14="http://schemas.microsoft.com/office/mac/drawingml/2011/main" xmlns="" val="0"/>
+              <ma14:wrappingTextBoxFlag xmlns="" xmlns:ma14="http://schemas.microsoft.com/office/mac/drawingml/2011/main" val="0"/>
             </a:ext>
           </a:extLst>
         </p:spPr>
@@ -3994,7 +3995,7 @@
           </a:prstGeom>
           <a:extLst>
             <a:ext uri="{C572A759-6A51-4108-AA02-DFA0A04FC94B}">
-              <ma14:wrappingTextBoxFlag xmlns:ma14="http://schemas.microsoft.com/office/mac/drawingml/2011/main" xmlns="" val="0"/>
+              <ma14:wrappingTextBoxFlag xmlns="" xmlns:ma14="http://schemas.microsoft.com/office/mac/drawingml/2011/main" val="0"/>
             </a:ext>
           </a:extLst>
         </p:spPr>
@@ -4292,7 +4293,7 @@
           </a:prstGeom>
           <a:extLst>
             <a:ext uri="{C572A759-6A51-4108-AA02-DFA0A04FC94B}">
-              <ma14:wrappingTextBoxFlag xmlns:ma14="http://schemas.microsoft.com/office/mac/drawingml/2011/main" xmlns="" val="0"/>
+              <ma14:wrappingTextBoxFlag xmlns="" xmlns:ma14="http://schemas.microsoft.com/office/mac/drawingml/2011/main" val="0"/>
             </a:ext>
           </a:extLst>
         </p:spPr>
@@ -4590,7 +4591,7 @@
           </a:prstGeom>
           <a:extLst>
             <a:ext uri="{C572A759-6A51-4108-AA02-DFA0A04FC94B}">
-              <ma14:wrappingTextBoxFlag xmlns:ma14="http://schemas.microsoft.com/office/mac/drawingml/2011/main" xmlns="" val="0"/>
+              <ma14:wrappingTextBoxFlag xmlns="" xmlns:ma14="http://schemas.microsoft.com/office/mac/drawingml/2011/main" val="0"/>
             </a:ext>
           </a:extLst>
         </p:spPr>
@@ -4888,7 +4889,7 @@
           </a:prstGeom>
           <a:extLst>
             <a:ext uri="{C572A759-6A51-4108-AA02-DFA0A04FC94B}">
-              <ma14:wrappingTextBoxFlag xmlns:ma14="http://schemas.microsoft.com/office/mac/drawingml/2011/main" xmlns="" val="0"/>
+              <ma14:wrappingTextBoxFlag xmlns="" xmlns:ma14="http://schemas.microsoft.com/office/mac/drawingml/2011/main" val="0"/>
             </a:ext>
           </a:extLst>
         </p:spPr>
@@ -6991,7 +6992,7 @@
           </a:prstGeom>
           <a:extLst>
             <a:ext uri="{C572A759-6A51-4108-AA02-DFA0A04FC94B}">
-              <ma14:wrappingTextBoxFlag xmlns:ma14="http://schemas.microsoft.com/office/mac/drawingml/2011/main" xmlns="" val="0"/>
+              <ma14:wrappingTextBoxFlag xmlns="" xmlns:ma14="http://schemas.microsoft.com/office/mac/drawingml/2011/main" val="0"/>
             </a:ext>
           </a:extLst>
         </p:spPr>
@@ -7635,7 +7636,7 @@
           </a:prstGeom>
           <a:extLst>
             <a:ext uri="{C572A759-6A51-4108-AA02-DFA0A04FC94B}">
-              <ma14:wrappingTextBoxFlag xmlns:ma14="http://schemas.microsoft.com/office/mac/drawingml/2011/main" xmlns="" val="0"/>
+              <ma14:wrappingTextBoxFlag xmlns="" xmlns:ma14="http://schemas.microsoft.com/office/mac/drawingml/2011/main" val="0"/>
             </a:ext>
           </a:extLst>
         </p:spPr>
@@ -8105,7 +8106,7 @@
           </a:prstGeom>
           <a:extLst>
             <a:ext uri="{C572A759-6A51-4108-AA02-DFA0A04FC94B}">
-              <ma14:wrappingTextBoxFlag xmlns:ma14="http://schemas.microsoft.com/office/mac/drawingml/2011/main" xmlns="" val="0"/>
+              <ma14:wrappingTextBoxFlag xmlns="" xmlns:ma14="http://schemas.microsoft.com/office/mac/drawingml/2011/main" val="0"/>
             </a:ext>
           </a:extLst>
         </p:spPr>
@@ -8195,7 +8196,18 @@
                 <a:ea typeface="Cambria" pitchFamily="34" charset="-122"/>
                 <a:cs typeface="Cambria" pitchFamily="34" charset="-120"/>
               </a:rPr>
-              <a:t>Referencias</a:t>
+              <a:t>Fuentes de </a:t>
+            </a:r>
+            <a:r>
+              <a:rPr lang="en-US" sz="2800" b="1" dirty="0" err="1">
+                <a:solidFill>
+                  <a:srgbClr val="0F172A"/>
+                </a:solidFill>
+                <a:latin typeface="Cambria" pitchFamily="34" charset="0"/>
+                <a:ea typeface="Cambria" pitchFamily="34" charset="-122"/>
+                <a:cs typeface="Cambria" pitchFamily="34" charset="-120"/>
+              </a:rPr>
+              <a:t>Información</a:t>
             </a:r>
             <a:endParaRPr lang="en-US" sz="2800" dirty="0"/>
           </a:p>
@@ -8578,7 +8590,7 @@
           </a:prstGeom>
           <a:extLst>
             <a:ext uri="{C572A759-6A51-4108-AA02-DFA0A04FC94B}">
-              <ma14:wrappingTextBoxFlag xmlns:ma14="http://schemas.microsoft.com/office/mac/drawingml/2011/main" xmlns="" val="0"/>
+              <ma14:wrappingTextBoxFlag xmlns="" xmlns:ma14="http://schemas.microsoft.com/office/mac/drawingml/2011/main" val="0"/>
             </a:ext>
           </a:extLst>
         </p:spPr>
@@ -9159,7 +9171,7 @@
           </a:prstGeom>
           <a:extLst>
             <a:ext uri="{C572A759-6A51-4108-AA02-DFA0A04FC94B}">
-              <ma14:wrappingTextBoxFlag xmlns:ma14="http://schemas.microsoft.com/office/mac/drawingml/2011/main" xmlns="" val="0"/>
+              <ma14:wrappingTextBoxFlag xmlns="" xmlns:ma14="http://schemas.microsoft.com/office/mac/drawingml/2011/main" val="0"/>
             </a:ext>
           </a:extLst>
         </p:spPr>
@@ -9188,6 +9200,175 @@
         </p:txBody>
       </p:sp>
     </p:spTree>
+  </p:cSld>
+  <p:clrMapOvr>
+    <a:masterClrMapping/>
+  </p:clrMapOvr>
+</p:sld>
+</file>
+
+<file path=ppt/slides/slide20.xml><?xml version="1.0" encoding="utf-8"?>
+<p:sld xmlns:a="http://schemas.openxmlformats.org/drawingml/2006/main" xmlns:r="http://schemas.openxmlformats.org/officeDocument/2006/relationships" xmlns:p="http://schemas.openxmlformats.org/presentationml/2006/main">
+  <p:cSld>
+    <p:spTree>
+      <p:nvGrpSpPr>
+        <p:cNvPr id="1" name=""/>
+        <p:cNvGrpSpPr/>
+        <p:nvPr/>
+      </p:nvGrpSpPr>
+      <p:grpSpPr>
+        <a:xfrm>
+          <a:off x="0" y="0"/>
+          <a:ext cx="0" cy="0"/>
+          <a:chOff x="0" y="0"/>
+          <a:chExt cx="0" cy="0"/>
+        </a:xfrm>
+      </p:grpSpPr>
+      <p:sp>
+        <p:nvSpPr>
+          <p:cNvPr id="2" name="Título 1">
+            <a:extLst>
+              <a:ext uri="{FF2B5EF4-FFF2-40B4-BE49-F238E27FC236}">
+                <a16:creationId xmlns:a16="http://schemas.microsoft.com/office/drawing/2014/main" id="{6AFC23E2-62F2-7DC4-B140-E84AB2A8B946}"/>
+              </a:ext>
+            </a:extLst>
+          </p:cNvPr>
+          <p:cNvSpPr>
+            <a:spLocks noGrp="1"/>
+          </p:cNvSpPr>
+          <p:nvPr>
+            <p:ph type="title" idx="100"/>
+          </p:nvPr>
+        </p:nvSpPr>
+        <p:spPr/>
+        <p:txBody>
+          <a:bodyPr/>
+          <a:lstStyle/>
+          <a:p>
+            <a:r>
+              <a:rPr lang="es-MX" dirty="0"/>
+              <a:t>ANEXO LINK DE LA ACTIVIDAD SOLICITADA Y ENVIADA POR GITHUB:</a:t>
+            </a:r>
+          </a:p>
+        </p:txBody>
+      </p:sp>
+      <p:sp>
+        <p:nvSpPr>
+          <p:cNvPr id="4" name="CuadroTexto 3">
+            <a:hlinkClick r:id="rId2"/>
+            <a:extLst>
+              <a:ext uri="{FF2B5EF4-FFF2-40B4-BE49-F238E27FC236}">
+                <a16:creationId xmlns:a16="http://schemas.microsoft.com/office/drawing/2014/main" id="{79BD374B-CA87-C319-7009-466C6F8DC991}"/>
+              </a:ext>
+            </a:extLst>
+          </p:cNvPr>
+          <p:cNvSpPr txBox="1"/>
+          <p:nvPr/>
+        </p:nvSpPr>
+        <p:spPr>
+          <a:xfrm>
+            <a:off x="599440" y="1548676"/>
+            <a:ext cx="11274552" cy="923330"/>
+          </a:xfrm>
+          <a:prstGeom prst="rect">
+            <a:avLst/>
+          </a:prstGeom>
+          <a:noFill/>
+        </p:spPr>
+        <p:txBody>
+          <a:bodyPr wrap="square">
+            <a:spAutoFit/>
+          </a:bodyPr>
+          <a:lstStyle/>
+          <a:p>
+            <a:r>
+              <a:rPr lang="es-MX" dirty="0"/>
+              <a:t>https://github.com/Cynthia21Morales/LYAII_CynthiaJasmineMT/blob/main/LYAII-Tema-4/Actividad%204.2%20Proyecto%20Analizador%20Sem%C3%A1ntico%20en%20Java_CynthiaMorales_LYAII_7ISCM.pptx</a:t>
+            </a:r>
+          </a:p>
+        </p:txBody>
+      </p:sp>
+      <p:sp>
+        <p:nvSpPr>
+          <p:cNvPr id="6" name="CuadroTexto 5">
+            <a:hlinkClick r:id="rId3"/>
+            <a:extLst>
+              <a:ext uri="{FF2B5EF4-FFF2-40B4-BE49-F238E27FC236}">
+                <a16:creationId xmlns:a16="http://schemas.microsoft.com/office/drawing/2014/main" id="{4A8286A7-2CA3-97BC-1A1F-0424FDB20F1F}"/>
+              </a:ext>
+            </a:extLst>
+          </p:cNvPr>
+          <p:cNvSpPr txBox="1"/>
+          <p:nvPr/>
+        </p:nvSpPr>
+        <p:spPr>
+          <a:xfrm>
+            <a:off x="599440" y="3105835"/>
+            <a:ext cx="11132312" cy="646331"/>
+          </a:xfrm>
+          <a:prstGeom prst="rect">
+            <a:avLst/>
+          </a:prstGeom>
+          <a:noFill/>
+        </p:spPr>
+        <p:txBody>
+          <a:bodyPr wrap="square">
+            <a:spAutoFit/>
+          </a:bodyPr>
+          <a:lstStyle/>
+          <a:p>
+            <a:r>
+              <a:rPr lang="es-MX" dirty="0"/>
+              <a:t>https://github.com/Cynthia21Morales/LYAII_CynthiaJasmineMT/tree/main/LYAII-Tema-4/GeneracionDeCodigoObjeto1</a:t>
+            </a:r>
+          </a:p>
+        </p:txBody>
+      </p:sp>
+      <p:sp>
+        <p:nvSpPr>
+          <p:cNvPr id="7" name="CuadroTexto 6">
+            <a:extLst>
+              <a:ext uri="{FF2B5EF4-FFF2-40B4-BE49-F238E27FC236}">
+                <a16:creationId xmlns:a16="http://schemas.microsoft.com/office/drawing/2014/main" id="{41F390E1-A648-0314-506F-AB04FF19D427}"/>
+              </a:ext>
+            </a:extLst>
+          </p:cNvPr>
+          <p:cNvSpPr txBox="1"/>
+          <p:nvPr/>
+        </p:nvSpPr>
+        <p:spPr>
+          <a:xfrm>
+            <a:off x="599440" y="2550160"/>
+            <a:ext cx="7579360" cy="369332"/>
+          </a:xfrm>
+          <a:prstGeom prst="rect">
+            <a:avLst/>
+          </a:prstGeom>
+          <a:noFill/>
+        </p:spPr>
+        <p:txBody>
+          <a:bodyPr wrap="square" rtlCol="0">
+            <a:spAutoFit/>
+          </a:bodyPr>
+          <a:lstStyle/>
+          <a:p>
+            <a:r>
+              <a:rPr lang="es-MX" dirty="0">
+                <a:solidFill>
+                  <a:schemeClr val="accent1"/>
+                </a:solidFill>
+              </a:rPr>
+              <a:t>JUNTO A ELLA SE ADJUNTA EL PROYECTO ANALIZADOR REALIZADO</a:t>
+            </a:r>
+          </a:p>
+        </p:txBody>
+      </p:sp>
+    </p:spTree>
+    <p:extLst>
+      <p:ext uri="{BB962C8B-B14F-4D97-AF65-F5344CB8AC3E}">
+        <p14:creationId xmlns:p14="http://schemas.microsoft.com/office/powerpoint/2010/main" val="3167876518"/>
+      </p:ext>
+    </p:extLst>
   </p:cSld>
   <p:clrMapOvr>
     <a:masterClrMapping/>
@@ -9557,7 +9738,7 @@
           </a:prstGeom>
           <a:extLst>
             <a:ext uri="{C572A759-6A51-4108-AA02-DFA0A04FC94B}">
-              <ma14:wrappingTextBoxFlag xmlns:ma14="http://schemas.microsoft.com/office/mac/drawingml/2011/main" xmlns="" val="0"/>
+              <ma14:wrappingTextBoxFlag xmlns="" xmlns:ma14="http://schemas.microsoft.com/office/mac/drawingml/2011/main" val="0"/>
             </a:ext>
           </a:extLst>
         </p:spPr>
@@ -10201,7 +10382,7 @@
           </a:prstGeom>
           <a:extLst>
             <a:ext uri="{C572A759-6A51-4108-AA02-DFA0A04FC94B}">
-              <ma14:wrappingTextBoxFlag xmlns:ma14="http://schemas.microsoft.com/office/mac/drawingml/2011/main" xmlns="" val="0"/>
+              <ma14:wrappingTextBoxFlag xmlns="" xmlns:ma14="http://schemas.microsoft.com/office/mac/drawingml/2011/main" val="0"/>
             </a:ext>
           </a:extLst>
         </p:spPr>
@@ -11450,7 +11631,7 @@
           </a:prstGeom>
           <a:extLst>
             <a:ext uri="{C572A759-6A51-4108-AA02-DFA0A04FC94B}">
-              <ma14:wrappingTextBoxFlag xmlns:ma14="http://schemas.microsoft.com/office/mac/drawingml/2011/main" xmlns="" val="0"/>
+              <ma14:wrappingTextBoxFlag xmlns="" xmlns:ma14="http://schemas.microsoft.com/office/mac/drawingml/2011/main" val="0"/>
             </a:ext>
           </a:extLst>
         </p:spPr>
@@ -11748,7 +11929,7 @@
           </a:prstGeom>
           <a:extLst>
             <a:ext uri="{C572A759-6A51-4108-AA02-DFA0A04FC94B}">
-              <ma14:wrappingTextBoxFlag xmlns:ma14="http://schemas.microsoft.com/office/mac/drawingml/2011/main" xmlns="" val="0"/>
+              <ma14:wrappingTextBoxFlag xmlns="" xmlns:ma14="http://schemas.microsoft.com/office/mac/drawingml/2011/main" val="0"/>
             </a:ext>
           </a:extLst>
         </p:spPr>
@@ -12046,7 +12227,7 @@
           </a:prstGeom>
           <a:extLst>
             <a:ext uri="{C572A759-6A51-4108-AA02-DFA0A04FC94B}">
-              <ma14:wrappingTextBoxFlag xmlns:ma14="http://schemas.microsoft.com/office/mac/drawingml/2011/main" xmlns="" val="0"/>
+              <ma14:wrappingTextBoxFlag xmlns="" xmlns:ma14="http://schemas.microsoft.com/office/mac/drawingml/2011/main" val="0"/>
             </a:ext>
           </a:extLst>
         </p:spPr>
@@ -12344,7 +12525,7 @@
           </a:prstGeom>
           <a:extLst>
             <a:ext uri="{C572A759-6A51-4108-AA02-DFA0A04FC94B}">
-              <ma14:wrappingTextBoxFlag xmlns:ma14="http://schemas.microsoft.com/office/mac/drawingml/2011/main" xmlns="" val="0"/>
+              <ma14:wrappingTextBoxFlag xmlns="" xmlns:ma14="http://schemas.microsoft.com/office/mac/drawingml/2011/main" val="0"/>
             </a:ext>
           </a:extLst>
         </p:spPr>
@@ -12642,7 +12823,7 @@
           </a:prstGeom>
           <a:extLst>
             <a:ext uri="{C572A759-6A51-4108-AA02-DFA0A04FC94B}">
-              <ma14:wrappingTextBoxFlag xmlns:ma14="http://schemas.microsoft.com/office/mac/drawingml/2011/main" xmlns="" val="0"/>
+              <ma14:wrappingTextBoxFlag xmlns="" xmlns:ma14="http://schemas.microsoft.com/office/mac/drawingml/2011/main" val="0"/>
             </a:ext>
           </a:extLst>
         </p:spPr>
